--- a/neerlandais1/powerpoints/Module_5_De_of_het.pptx
+++ b/neerlandais1/powerpoints/Module_5_De_of_het.pptx
@@ -139,18 +139,18 @@
   <p:extLst>
     <p:ext uri="{521415D9-36F7-43E2-AB2F-B90AF26B5E84}">
       <p14:sectionLst xmlns:p14="http://schemas.microsoft.com/office/powerpoint/2010/main">
-        <p14:section name="Ouverture" id="{1e3043dd-8181-ad55-1aaa-7e59f306f952}">
+        <p14:section name="Ouverture" id="{57208678-2d31-ce90-8d6d-b058f311662f}">
           <p14:sldIdLst>
             <p14:sldId id="256"/>
           </p14:sldIdLst>
         </p14:section>
-        <p14:section name="Découvrir" id="{69a7cd0a-efb3-da37-bce1-74af8fc138b0}">
+        <p14:section name="Découvrir" id="{50713169-d242-a34e-605b-10148ca8ca11}">
           <p14:sldIdLst>
             <p14:sldId id="257"/>
             <p14:sldId id="258"/>
           </p14:sldIdLst>
         </p14:section>
-        <p14:section name="Le système" id="{524af907-e295-195c-78cb-daabfee80692}">
+        <p14:section name="Le système" id="{53a7b623-1017-028d-c4d4-a670c278d5c1}">
           <p14:sldIdLst>
             <p14:sldId id="259"/>
             <p14:sldId id="260"/>
@@ -158,7 +158,7 @@
             <p14:sldId id="262"/>
           </p14:sldIdLst>
         </p14:section>
-        <p14:section name="Les familles DE" id="{fcece87c-e8fa-fcfa-a28b-86a0bb12b773}">
+        <p14:section name="Les familles DE" id="{451c78cc-2900-8dff-2a46-9d67ea46af08}">
           <p14:sldIdLst>
             <p14:sldId id="263"/>
             <p14:sldId id="264"/>
@@ -166,7 +166,7 @@
             <p14:sldId id="266"/>
           </p14:sldIdLst>
         </p14:section>
-        <p14:section name="Les familles HET · mots composés" id="{029d7d49-c199-7073-7a4d-485741934e51}">
+        <p14:section name="Les familles HET · mots composés" id="{59e209e5-c6b9-72aa-58a7-9f3143eef408}">
           <p14:sldIdLst>
             <p14:sldId id="267"/>
             <p14:sldId id="268"/>
@@ -177,7 +177,7 @@
             <p14:sldId id="273"/>
           </p14:sldIdLst>
         </p14:section>
-        <p14:section name="JIJ NU ! — Oefeningen" id="{8bcc11f6-55ff-3086-c94d-ac5eca92c808}">
+        <p14:section name="JIJ NU ! — Oefeningen" id="{3196492c-cb04-669d-86e8-63e614621db0}">
           <p14:sldIdLst>
             <p14:sldId id="274"/>
             <p14:sldId id="275"/>
@@ -195,7 +195,7 @@
             <p14:sldId id="287"/>
           </p14:sldIdLst>
         </p14:section>
-        <p14:section name="Clôture" id="{d709c816-cf76-f40f-99ee-f24d120f50e7}">
+        <p14:section name="Clôture" id="{36ef4ba4-5b6d-06d2-5400-76ca70ca2eb4}">
           <p14:sldIdLst>
             <p14:sldId id="288"/>
           </p14:sldIdLst>
@@ -3165,12 +3165,12 @@
           <a:p>
             <a:r>
               <a:rPr lang="en-US" dirty="0"/>
-              <a:t>Objectif : Vérifier les objectifs du module et clore le parcours Néerlandais 1 par une auto-évaluation globale.
+              <a:t>Objectif : Vérifier les objectifs du module et clore le bloc 1 (M1–M5) par une auto-évaluation globale.
 Réponses :
 1. het (ge-) · de (-ing) · het (-je).
 2. de boeken.
 3. de kantoordeur.
-Les résultats du bilan orientent la révision avant l'évaluation de l'UE1 : renvoyez chaque apprenant à la diapo « À retenir » du module où il a coché 😟 (M1 d. 9, M2 d. 13, M3 d. 19, M4 d. 15, M5 d. 18).</a:t>
+Les résultats du bilan orientent la révision avant le bloc 2 (M6–M10), qui reprend chaque thème en spirale : renvoyez chaque apprenant à la diapo « À retenir » du module où il a coché 😟 (M1 d. 9, M2 d. 13, M3 d. 19, M4 d. 15, M5 d. 18).</a:t>
             </a:r>
             <a:endParaRPr lang="en-US" dirty="0"/>
           </a:p>
@@ -4578,7 +4578,7 @@
         <p:spPr>
           <a:xfrm>
             <a:off x="548640" y="640080"/>
-            <a:ext cx="1876349" cy="384048"/>
+            <a:ext cx="2002231" cy="384048"/>
           </a:xfrm>
           <a:prstGeom prst="roundRect">
             <a:avLst>
@@ -4603,7 +4603,7 @@
                   <a:srgbClr val="FFFFFF"/>
                 </a:solidFill>
               </a:rPr>
-              <a:t>MODULE 5 / 5</a:t>
+              <a:t>MODULE 5 / 10</a:t>
             </a:r>
             <a:endParaRPr lang="en-US" sz="1400" dirty="0"/>
           </a:p>
@@ -53685,7 +53685,7 @@
                   <a:schemeClr val="tx2"/>
                 </a:solidFill>
               </a:rPr>
-              <a:t>Ticket de sortie — et bilan du parcours</a:t>
+              <a:t>Ticket de sortie — et bilan du bloc 1</a:t>
             </a:r>
             <a:endParaRPr lang="en-US" sz="3000" dirty="0"/>
           </a:p>
@@ -54935,7 +54935,7 @@
                   <a:schemeClr val="bg1"/>
                 </a:solidFill>
               </a:rPr>
-              <a:t>Volgende stap: Néerlandais 2</a:t>
+              <a:t>Volgende stap: bloc 2</a:t>
             </a:r>
             <a:r>
               <a:rPr lang="en-US" sz="1800" dirty="0">
@@ -54943,7 +54943,23 @@
                   <a:schemeClr val="bg1"/>
                 </a:solidFill>
               </a:rPr>
-              <a:t> — bravo, le parcours Néerlandais 1 est terminé !</a:t>
+              <a:t> — M6 Tweeklanken : les sons doubles (</a:t>
+            </a:r>
+            <a:r>
+              <a:rPr lang="en-US" sz="1800" i="1" dirty="0">
+                <a:solidFill>
+                  <a:schemeClr val="bg1"/>
+                </a:solidFill>
+              </a:rPr>
+              <a:t>huis, tijd, keuken</a:t>
+            </a:r>
+            <a:r>
+              <a:rPr lang="en-US" sz="1800" dirty="0">
+                <a:solidFill>
+                  <a:schemeClr val="bg1"/>
+                </a:solidFill>
+              </a:rPr>
+              <a:t>)</a:t>
             </a:r>
             <a:endParaRPr lang="en-US" sz="1800" dirty="0"/>
           </a:p>

--- a/neerlandais1/powerpoints/Module_5_De_of_het.pptx
+++ b/neerlandais1/powerpoints/Module_5_De_of_het.pptx
@@ -139,18 +139,18 @@
   <p:extLst>
     <p:ext uri="{521415D9-36F7-43E2-AB2F-B90AF26B5E84}">
       <p14:sectionLst xmlns:p14="http://schemas.microsoft.com/office/powerpoint/2010/main">
-        <p14:section name="Ouverture" id="{57208678-2d31-ce90-8d6d-b058f311662f}">
+        <p14:section name="Ouverture" id="{4f81ab45-71aa-2471-b28f-ce101b70296f}">
           <p14:sldIdLst>
             <p14:sldId id="256"/>
           </p14:sldIdLst>
         </p14:section>
-        <p14:section name="Découvrir" id="{50713169-d242-a34e-605b-10148ca8ca11}">
+        <p14:section name="Découvrir" id="{e3bc5a63-0b89-0e7a-f91d-260f91324fc1}">
           <p14:sldIdLst>
             <p14:sldId id="257"/>
             <p14:sldId id="258"/>
           </p14:sldIdLst>
         </p14:section>
-        <p14:section name="Le système" id="{53a7b623-1017-028d-c4d4-a670c278d5c1}">
+        <p14:section name="Le système" id="{bd788829-ac8d-12d2-a248-69c67d71d0ae}">
           <p14:sldIdLst>
             <p14:sldId id="259"/>
             <p14:sldId id="260"/>
@@ -158,7 +158,7 @@
             <p14:sldId id="262"/>
           </p14:sldIdLst>
         </p14:section>
-        <p14:section name="Les familles DE" id="{451c78cc-2900-8dff-2a46-9d67ea46af08}">
+        <p14:section name="Les familles DE" id="{dee9195b-cb2a-d70e-f281-6366a47a34dc}">
           <p14:sldIdLst>
             <p14:sldId id="263"/>
             <p14:sldId id="264"/>
@@ -166,7 +166,7 @@
             <p14:sldId id="266"/>
           </p14:sldIdLst>
         </p14:section>
-        <p14:section name="Les familles HET · mots composés" id="{59e209e5-c6b9-72aa-58a7-9f3143eef408}">
+        <p14:section name="Les familles HET · mots composés" id="{eceb36c0-eb64-888d-5555-8d5b1a8bba4d}">
           <p14:sldIdLst>
             <p14:sldId id="267"/>
             <p14:sldId id="268"/>
@@ -177,7 +177,7 @@
             <p14:sldId id="273"/>
           </p14:sldIdLst>
         </p14:section>
-        <p14:section name="JIJ NU ! — Oefeningen" id="{3196492c-cb04-669d-86e8-63e614621db0}">
+        <p14:section name="JIJ NU ! — Oefeningen" id="{900beba1-4e90-8cf7-d0c0-6b2579b27277}">
           <p14:sldIdLst>
             <p14:sldId id="274"/>
             <p14:sldId id="275"/>
@@ -195,7 +195,7 @@
             <p14:sldId id="287"/>
           </p14:sldIdLst>
         </p14:section>
-        <p14:section name="Clôture" id="{36ef4ba4-5b6d-06d2-5400-76ca70ca2eb4}">
+        <p14:section name="Clôture" id="{c0ec873a-6404-6fe5-62e8-22787d945e3a}">
           <p14:sldIdLst>
             <p14:sldId id="288"/>
           </p14:sldIdLst>
@@ -4603,7 +4603,7 @@
                   <a:srgbClr val="FFFFFF"/>
                 </a:solidFill>
               </a:rPr>
-              <a:t>MODULE 5 / 10</a:t>
+              <a:t>MODULE 5 / 15</a:t>
             </a:r>
             <a:endParaRPr lang="en-US" sz="1400" dirty="0"/>
           </a:p>

--- a/neerlandais1/powerpoints/Module_5_De_of_het.pptx
+++ b/neerlandais1/powerpoints/Module_5_De_of_het.pptx
@@ -139,18 +139,18 @@
   <p:extLst>
     <p:ext uri="{521415D9-36F7-43E2-AB2F-B90AF26B5E84}">
       <p14:sectionLst xmlns:p14="http://schemas.microsoft.com/office/powerpoint/2010/main">
-        <p14:section name="Ouverture" id="{4f81ab45-71aa-2471-b28f-ce101b70296f}">
+        <p14:section name="Ouverture" id="{f395463e-de8b-d3b4-e980-434b9b0a400b}">
           <p14:sldIdLst>
             <p14:sldId id="256"/>
           </p14:sldIdLst>
         </p14:section>
-        <p14:section name="Découvrir" id="{e3bc5a63-0b89-0e7a-f91d-260f91324fc1}">
+        <p14:section name="Découvrir" id="{5d24a6a2-741b-0046-3e78-81b91fa00bbd}">
           <p14:sldIdLst>
             <p14:sldId id="257"/>
             <p14:sldId id="258"/>
           </p14:sldIdLst>
         </p14:section>
-        <p14:section name="Le système" id="{bd788829-ac8d-12d2-a248-69c67d71d0ae}">
+        <p14:section name="Le système" id="{7430d89f-bb99-e30a-39f9-b3229ac87f5f}">
           <p14:sldIdLst>
             <p14:sldId id="259"/>
             <p14:sldId id="260"/>
@@ -158,7 +158,7 @@
             <p14:sldId id="262"/>
           </p14:sldIdLst>
         </p14:section>
-        <p14:section name="Les familles DE" id="{dee9195b-cb2a-d70e-f281-6366a47a34dc}">
+        <p14:section name="Les familles DE" id="{6c878e38-7220-1333-2404-03bb7f9147a4}">
           <p14:sldIdLst>
             <p14:sldId id="263"/>
             <p14:sldId id="264"/>
@@ -166,7 +166,7 @@
             <p14:sldId id="266"/>
           </p14:sldIdLst>
         </p14:section>
-        <p14:section name="Les familles HET · mots composés" id="{eceb36c0-eb64-888d-5555-8d5b1a8bba4d}">
+        <p14:section name="Les familles HET · mots composés" id="{91b41d30-243d-fb6f-c47f-46eb0cd1c8cf}">
           <p14:sldIdLst>
             <p14:sldId id="267"/>
             <p14:sldId id="268"/>
@@ -177,7 +177,7 @@
             <p14:sldId id="273"/>
           </p14:sldIdLst>
         </p14:section>
-        <p14:section name="JIJ NU ! — Oefeningen" id="{900beba1-4e90-8cf7-d0c0-6b2579b27277}">
+        <p14:section name="JIJ NU ! — Oefeningen" id="{db8604af-7dd6-f5e1-12dc-dc739995f2ab}">
           <p14:sldIdLst>
             <p14:sldId id="274"/>
             <p14:sldId id="275"/>
@@ -195,7 +195,7 @@
             <p14:sldId id="287"/>
           </p14:sldIdLst>
         </p14:section>
-        <p14:section name="Clôture" id="{c0ec873a-6404-6fe5-62e8-22787d945e3a}">
+        <p14:section name="Clôture" id="{b4219ef4-f32f-57ca-994e-f85f820e7046}">
           <p14:sldIdLst>
             <p14:sldId id="288"/>
           </p14:sldIdLst>
@@ -4603,7 +4603,7 @@
                   <a:srgbClr val="FFFFFF"/>
                 </a:solidFill>
               </a:rPr>
-              <a:t>MODULE 5 / 15</a:t>
+              <a:t>MODULE 5 / 19</a:t>
             </a:r>
             <a:endParaRPr lang="en-US" sz="1400" dirty="0"/>
           </a:p>

--- a/neerlandais1/powerpoints/Module_5_De_of_het.pptx
+++ b/neerlandais1/powerpoints/Module_5_De_of_het.pptx
@@ -139,18 +139,18 @@
   <p:extLst>
     <p:ext uri="{521415D9-36F7-43E2-AB2F-B90AF26B5E84}">
       <p14:sectionLst xmlns:p14="http://schemas.microsoft.com/office/powerpoint/2010/main">
-        <p14:section name="Ouverture" id="{f395463e-de8b-d3b4-e980-434b9b0a400b}">
+        <p14:section name="Ouverture" id="{b3cf540d-e52b-e7be-dfe8-32549080405b}">
           <p14:sldIdLst>
             <p14:sldId id="256"/>
           </p14:sldIdLst>
         </p14:section>
-        <p14:section name="Découvrir" id="{5d24a6a2-741b-0046-3e78-81b91fa00bbd}">
+        <p14:section name="Découvrir" id="{4eb66ee4-a9b1-3708-8d73-7c90adf7925a}">
           <p14:sldIdLst>
             <p14:sldId id="257"/>
             <p14:sldId id="258"/>
           </p14:sldIdLst>
         </p14:section>
-        <p14:section name="Le système" id="{7430d89f-bb99-e30a-39f9-b3229ac87f5f}">
+        <p14:section name="Le système" id="{a4749fe0-e102-4909-61f8-7e2d0e3113df}">
           <p14:sldIdLst>
             <p14:sldId id="259"/>
             <p14:sldId id="260"/>
@@ -158,7 +158,7 @@
             <p14:sldId id="262"/>
           </p14:sldIdLst>
         </p14:section>
-        <p14:section name="Les familles DE" id="{6c878e38-7220-1333-2404-03bb7f9147a4}">
+        <p14:section name="Les familles DE" id="{ff6fa35d-970d-3cf7-de0c-75a7bdea14e9}">
           <p14:sldIdLst>
             <p14:sldId id="263"/>
             <p14:sldId id="264"/>
@@ -166,7 +166,7 @@
             <p14:sldId id="266"/>
           </p14:sldIdLst>
         </p14:section>
-        <p14:section name="Les familles HET · mots composés" id="{91b41d30-243d-fb6f-c47f-46eb0cd1c8cf}">
+        <p14:section name="Les familles HET · mots composés" id="{60775044-3e49-4f24-4b6b-2d34c07bd054}">
           <p14:sldIdLst>
             <p14:sldId id="267"/>
             <p14:sldId id="268"/>
@@ -177,7 +177,7 @@
             <p14:sldId id="273"/>
           </p14:sldIdLst>
         </p14:section>
-        <p14:section name="JIJ NU ! — Oefeningen" id="{db8604af-7dd6-f5e1-12dc-dc739995f2ab}">
+        <p14:section name="JIJ NU ! — Oefeningen" id="{03be542f-4d1f-2328-6ba2-b95fbae0a4bb}">
           <p14:sldIdLst>
             <p14:sldId id="274"/>
             <p14:sldId id="275"/>
@@ -195,7 +195,7 @@
             <p14:sldId id="287"/>
           </p14:sldIdLst>
         </p14:section>
-        <p14:section name="Clôture" id="{b4219ef4-f32f-57ca-994e-f85f820e7046}">
+        <p14:section name="Clôture" id="{1c395f77-44cf-fa6b-808c-e0649b651bb3}">
           <p14:sldIdLst>
             <p14:sldId id="288"/>
           </p14:sldIdLst>
@@ -4603,7 +4603,7 @@
                   <a:srgbClr val="FFFFFF"/>
                 </a:solidFill>
               </a:rPr>
-              <a:t>MODULE 5 / 19</a:t>
+              <a:t>MODULE 5 / 24</a:t>
             </a:r>
             <a:endParaRPr lang="en-US" sz="1400" dirty="0"/>
           </a:p>

--- a/neerlandais1/powerpoints/Module_5_De_of_het.pptx
+++ b/neerlandais1/powerpoints/Module_5_De_of_het.pptx
@@ -139,18 +139,18 @@
   <p:extLst>
     <p:ext uri="{521415D9-36F7-43E2-AB2F-B90AF26B5E84}">
       <p14:sectionLst xmlns:p14="http://schemas.microsoft.com/office/powerpoint/2010/main">
-        <p14:section name="Ouverture" id="{b3cf540d-e52b-e7be-dfe8-32549080405b}">
+        <p14:section name="Ouverture" id="{474e9bd5-f4c8-e5dd-9a71-0509a1a8668e}">
           <p14:sldIdLst>
             <p14:sldId id="256"/>
           </p14:sldIdLst>
         </p14:section>
-        <p14:section name="Découvrir" id="{4eb66ee4-a9b1-3708-8d73-7c90adf7925a}">
+        <p14:section name="Découvrir" id="{b260303e-ba74-3593-4d62-1c38300bb37d}">
           <p14:sldIdLst>
             <p14:sldId id="257"/>
             <p14:sldId id="258"/>
           </p14:sldIdLst>
         </p14:section>
-        <p14:section name="Le système" id="{a4749fe0-e102-4909-61f8-7e2d0e3113df}">
+        <p14:section name="Le système" id="{a0ed56bc-51d7-1389-74f0-34e691475349}">
           <p14:sldIdLst>
             <p14:sldId id="259"/>
             <p14:sldId id="260"/>
@@ -158,7 +158,7 @@
             <p14:sldId id="262"/>
           </p14:sldIdLst>
         </p14:section>
-        <p14:section name="Les familles DE" id="{ff6fa35d-970d-3cf7-de0c-75a7bdea14e9}">
+        <p14:section name="Les familles DE" id="{98e27ae0-7134-003f-630a-516a5637fb31}">
           <p14:sldIdLst>
             <p14:sldId id="263"/>
             <p14:sldId id="264"/>
@@ -166,7 +166,7 @@
             <p14:sldId id="266"/>
           </p14:sldIdLst>
         </p14:section>
-        <p14:section name="Les familles HET · mots composés" id="{60775044-3e49-4f24-4b6b-2d34c07bd054}">
+        <p14:section name="Les familles HET · mots composés" id="{7874e9b5-2bda-249c-078b-44f2622f4898}">
           <p14:sldIdLst>
             <p14:sldId id="267"/>
             <p14:sldId id="268"/>
@@ -177,7 +177,7 @@
             <p14:sldId id="273"/>
           </p14:sldIdLst>
         </p14:section>
-        <p14:section name="JIJ NU ! — Oefeningen" id="{03be542f-4d1f-2328-6ba2-b95fbae0a4bb}">
+        <p14:section name="JIJ NU ! — Oefeningen" id="{61edb580-87c8-aecf-a202-bc52cd1c8ceb}">
           <p14:sldIdLst>
             <p14:sldId id="274"/>
             <p14:sldId id="275"/>
@@ -195,7 +195,7 @@
             <p14:sldId id="287"/>
           </p14:sldIdLst>
         </p14:section>
-        <p14:section name="Clôture" id="{1c395f77-44cf-fa6b-808c-e0649b651bb3}">
+        <p14:section name="Clôture" id="{26480333-d683-29e2-9fd8-02d3dc64285d}">
           <p14:sldIdLst>
             <p14:sldId id="288"/>
           </p14:sldIdLst>
@@ -4603,7 +4603,7 @@
                   <a:srgbClr val="FFFFFF"/>
                 </a:solidFill>
               </a:rPr>
-              <a:t>MODULE 5 / 24</a:t>
+              <a:t>MODULE 5 / 29</a:t>
             </a:r>
             <a:endParaRPr lang="en-US" sz="1400" dirty="0"/>
           </a:p>

--- a/neerlandais1/powerpoints/Module_5_De_of_het.pptx
+++ b/neerlandais1/powerpoints/Module_5_De_of_het.pptx
@@ -139,18 +139,18 @@
   <p:extLst>
     <p:ext uri="{521415D9-36F7-43E2-AB2F-B90AF26B5E84}">
       <p14:sectionLst xmlns:p14="http://schemas.microsoft.com/office/powerpoint/2010/main">
-        <p14:section name="Ouverture" id="{474e9bd5-f4c8-e5dd-9a71-0509a1a8668e}">
+        <p14:section name="Ouverture" id="{e4e56ae1-25ec-6d9f-a68a-4bce1e500d72}">
           <p14:sldIdLst>
             <p14:sldId id="256"/>
           </p14:sldIdLst>
         </p14:section>
-        <p14:section name="Découvrir" id="{b260303e-ba74-3593-4d62-1c38300bb37d}">
+        <p14:section name="Découvrir" id="{b9dafc9c-b013-8c4d-24ee-d144d52123a5}">
           <p14:sldIdLst>
             <p14:sldId id="257"/>
             <p14:sldId id="258"/>
           </p14:sldIdLst>
         </p14:section>
-        <p14:section name="Le système" id="{a0ed56bc-51d7-1389-74f0-34e691475349}">
+        <p14:section name="Le système" id="{79e1bd39-4b3d-44e8-e807-23979208b1e5}">
           <p14:sldIdLst>
             <p14:sldId id="259"/>
             <p14:sldId id="260"/>
@@ -158,7 +158,7 @@
             <p14:sldId id="262"/>
           </p14:sldIdLst>
         </p14:section>
-        <p14:section name="Les familles DE" id="{98e27ae0-7134-003f-630a-516a5637fb31}">
+        <p14:section name="Les familles DE" id="{7ef373cb-59f7-42f5-abf5-ca32231229d1}">
           <p14:sldIdLst>
             <p14:sldId id="263"/>
             <p14:sldId id="264"/>
@@ -166,7 +166,7 @@
             <p14:sldId id="266"/>
           </p14:sldIdLst>
         </p14:section>
-        <p14:section name="Les familles HET · mots composés" id="{7874e9b5-2bda-249c-078b-44f2622f4898}">
+        <p14:section name="Les familles HET · mots composés" id="{7077a799-9914-b23e-f53f-2a6a131e33b1}">
           <p14:sldIdLst>
             <p14:sldId id="267"/>
             <p14:sldId id="268"/>
@@ -177,7 +177,7 @@
             <p14:sldId id="273"/>
           </p14:sldIdLst>
         </p14:section>
-        <p14:section name="JIJ NU ! — Oefeningen" id="{61edb580-87c8-aecf-a202-bc52cd1c8ceb}">
+        <p14:section name="JIJ NU ! — Oefeningen" id="{79b6be47-c917-0b37-d9a0-108680647dca}">
           <p14:sldIdLst>
             <p14:sldId id="274"/>
             <p14:sldId id="275"/>
@@ -195,7 +195,7 @@
             <p14:sldId id="287"/>
           </p14:sldIdLst>
         </p14:section>
-        <p14:section name="Clôture" id="{26480333-d683-29e2-9fd8-02d3dc64285d}">
+        <p14:section name="Clôture" id="{7392635b-157d-fd35-e8da-19e3e2b60513}">
           <p14:sldIdLst>
             <p14:sldId id="288"/>
           </p14:sldIdLst>
@@ -4603,7 +4603,7 @@
                   <a:srgbClr val="FFFFFF"/>
                 </a:solidFill>
               </a:rPr>
-              <a:t>MODULE 5 / 29</a:t>
+              <a:t>MODULE 5 / 32</a:t>
             </a:r>
             <a:endParaRPr lang="en-US" sz="1400" dirty="0"/>
           </a:p>

--- a/neerlandais1/powerpoints/Module_5_De_of_het.pptx
+++ b/neerlandais1/powerpoints/Module_5_De_of_het.pptx
@@ -139,18 +139,18 @@
   <p:extLst>
     <p:ext uri="{521415D9-36F7-43E2-AB2F-B90AF26B5E84}">
       <p14:sectionLst xmlns:p14="http://schemas.microsoft.com/office/powerpoint/2010/main">
-        <p14:section name="Ouverture" id="{e4e56ae1-25ec-6d9f-a68a-4bce1e500d72}">
+        <p14:section name="Ouverture" id="{d3d038e0-eaf2-effd-cd53-b6f904649cae}">
           <p14:sldIdLst>
             <p14:sldId id="256"/>
           </p14:sldIdLst>
         </p14:section>
-        <p14:section name="Découvrir" id="{b9dafc9c-b013-8c4d-24ee-d144d52123a5}">
+        <p14:section name="Découvrir" id="{4e7af9c2-7f77-7919-efc7-dc9df89bee48}">
           <p14:sldIdLst>
             <p14:sldId id="257"/>
             <p14:sldId id="258"/>
           </p14:sldIdLst>
         </p14:section>
-        <p14:section name="Le système" id="{79e1bd39-4b3d-44e8-e807-23979208b1e5}">
+        <p14:section name="Le système" id="{52fda2a7-b8cf-52ee-b30c-259972243326}">
           <p14:sldIdLst>
             <p14:sldId id="259"/>
             <p14:sldId id="260"/>
@@ -158,7 +158,7 @@
             <p14:sldId id="262"/>
           </p14:sldIdLst>
         </p14:section>
-        <p14:section name="Les familles DE" id="{7ef373cb-59f7-42f5-abf5-ca32231229d1}">
+        <p14:section name="Les familles DE" id="{70a19427-2428-eec0-d611-272aafcab14c}">
           <p14:sldIdLst>
             <p14:sldId id="263"/>
             <p14:sldId id="264"/>
@@ -166,7 +166,7 @@
             <p14:sldId id="266"/>
           </p14:sldIdLst>
         </p14:section>
-        <p14:section name="Les familles HET · mots composés" id="{7077a799-9914-b23e-f53f-2a6a131e33b1}">
+        <p14:section name="Les familles HET · mots composés" id="{048b5d6d-624e-cb83-8ccd-41e5e3b00eb0}">
           <p14:sldIdLst>
             <p14:sldId id="267"/>
             <p14:sldId id="268"/>
@@ -177,7 +177,7 @@
             <p14:sldId id="273"/>
           </p14:sldIdLst>
         </p14:section>
-        <p14:section name="JIJ NU ! — Oefeningen" id="{79b6be47-c917-0b37-d9a0-108680647dca}">
+        <p14:section name="JIJ NU ! — Oefeningen" id="{2b82b36a-2be3-816a-21fa-97a545b3c25f}">
           <p14:sldIdLst>
             <p14:sldId id="274"/>
             <p14:sldId id="275"/>
@@ -195,7 +195,7 @@
             <p14:sldId id="287"/>
           </p14:sldIdLst>
         </p14:section>
-        <p14:section name="Clôture" id="{7392635b-157d-fd35-e8da-19e3e2b60513}">
+        <p14:section name="Clôture" id="{6c11cc67-2e03-c0f1-b64c-b47eca0bc575}">
           <p14:sldIdLst>
             <p14:sldId id="288"/>
           </p14:sldIdLst>

--- a/neerlandais1/powerpoints/Module_5_De_of_het.pptx
+++ b/neerlandais1/powerpoints/Module_5_De_of_het.pptx
@@ -139,18 +139,18 @@
   <p:extLst>
     <p:ext uri="{521415D9-36F7-43E2-AB2F-B90AF26B5E84}">
       <p14:sectionLst xmlns:p14="http://schemas.microsoft.com/office/powerpoint/2010/main">
-        <p14:section name="Ouverture" id="{d3d038e0-eaf2-effd-cd53-b6f904649cae}">
+        <p14:section name="Ouverture" id="{3ee56340-2e2e-e659-7c93-b733e85bb023}">
           <p14:sldIdLst>
             <p14:sldId id="256"/>
           </p14:sldIdLst>
         </p14:section>
-        <p14:section name="Découvrir" id="{4e7af9c2-7f77-7919-efc7-dc9df89bee48}">
+        <p14:section name="Découvrir" id="{eff04cea-24f2-5b6f-0adb-1fa548636ea1}">
           <p14:sldIdLst>
             <p14:sldId id="257"/>
             <p14:sldId id="258"/>
           </p14:sldIdLst>
         </p14:section>
-        <p14:section name="Le système" id="{52fda2a7-b8cf-52ee-b30c-259972243326}">
+        <p14:section name="Le système" id="{5e27810a-9092-43dd-77d6-7302452d8c41}">
           <p14:sldIdLst>
             <p14:sldId id="259"/>
             <p14:sldId id="260"/>
@@ -158,7 +158,7 @@
             <p14:sldId id="262"/>
           </p14:sldIdLst>
         </p14:section>
-        <p14:section name="Les familles DE" id="{70a19427-2428-eec0-d611-272aafcab14c}">
+        <p14:section name="Les familles DE" id="{31fb5af0-ad4c-8743-8c01-ebe69695c935}">
           <p14:sldIdLst>
             <p14:sldId id="263"/>
             <p14:sldId id="264"/>
@@ -166,7 +166,7 @@
             <p14:sldId id="266"/>
           </p14:sldIdLst>
         </p14:section>
-        <p14:section name="Les familles HET · mots composés" id="{048b5d6d-624e-cb83-8ccd-41e5e3b00eb0}">
+        <p14:section name="Les familles HET · mots composés" id="{87cd9737-dbed-2676-37c3-c3a06c95d608}">
           <p14:sldIdLst>
             <p14:sldId id="267"/>
             <p14:sldId id="268"/>
@@ -177,7 +177,7 @@
             <p14:sldId id="273"/>
           </p14:sldIdLst>
         </p14:section>
-        <p14:section name="JIJ NU ! — Oefeningen" id="{2b82b36a-2be3-816a-21fa-97a545b3c25f}">
+        <p14:section name="JIJ NU ! — Oefeningen" id="{f8db0a07-0b8b-71f0-2a3f-f2e7bdefb536}">
           <p14:sldIdLst>
             <p14:sldId id="274"/>
             <p14:sldId id="275"/>
@@ -195,7 +195,7 @@
             <p14:sldId id="287"/>
           </p14:sldIdLst>
         </p14:section>
-        <p14:section name="Clôture" id="{6c11cc67-2e03-c0f1-b64c-b47eca0bc575}">
+        <p14:section name="Clôture" id="{1528e04d-db1a-aa2a-61a1-e5f408f914f9}">
           <p14:sldIdLst>
             <p14:sldId id="288"/>
           </p14:sldIdLst>

--- a/neerlandais1/powerpoints/Module_5_De_of_het.pptx
+++ b/neerlandais1/powerpoints/Module_5_De_of_het.pptx
@@ -139,18 +139,18 @@
   <p:extLst>
     <p:ext uri="{521415D9-36F7-43E2-AB2F-B90AF26B5E84}">
       <p14:sectionLst xmlns:p14="http://schemas.microsoft.com/office/powerpoint/2010/main">
-        <p14:section name="Ouverture" id="{3ee56340-2e2e-e659-7c93-b733e85bb023}">
+        <p14:section name="Ouverture" id="{df174f6a-05cf-382d-0b7d-f2d65998f96f}">
           <p14:sldIdLst>
             <p14:sldId id="256"/>
           </p14:sldIdLst>
         </p14:section>
-        <p14:section name="Découvrir" id="{eff04cea-24f2-5b6f-0adb-1fa548636ea1}">
+        <p14:section name="Découvrir" id="{f69f6964-26d1-1378-8606-69656ea43db0}">
           <p14:sldIdLst>
             <p14:sldId id="257"/>
             <p14:sldId id="258"/>
           </p14:sldIdLst>
         </p14:section>
-        <p14:section name="Le système" id="{5e27810a-9092-43dd-77d6-7302452d8c41}">
+        <p14:section name="Le système" id="{ed49c06a-6b9c-d686-3592-2aa4bc6f2f02}">
           <p14:sldIdLst>
             <p14:sldId id="259"/>
             <p14:sldId id="260"/>
@@ -158,7 +158,7 @@
             <p14:sldId id="262"/>
           </p14:sldIdLst>
         </p14:section>
-        <p14:section name="Les familles DE" id="{31fb5af0-ad4c-8743-8c01-ebe69695c935}">
+        <p14:section name="Les familles DE" id="{a91f7ec1-1883-3910-bdaf-0fdb262c6e98}">
           <p14:sldIdLst>
             <p14:sldId id="263"/>
             <p14:sldId id="264"/>
@@ -166,7 +166,7 @@
             <p14:sldId id="266"/>
           </p14:sldIdLst>
         </p14:section>
-        <p14:section name="Les familles HET · mots composés" id="{87cd9737-dbed-2676-37c3-c3a06c95d608}">
+        <p14:section name="Les familles HET · mots composés" id="{70839507-d2e4-1515-6be9-17b4903f0def}">
           <p14:sldIdLst>
             <p14:sldId id="267"/>
             <p14:sldId id="268"/>
@@ -177,7 +177,7 @@
             <p14:sldId id="273"/>
           </p14:sldIdLst>
         </p14:section>
-        <p14:section name="JIJ NU ! — Oefeningen" id="{f8db0a07-0b8b-71f0-2a3f-f2e7bdefb536}">
+        <p14:section name="JIJ NU ! — Oefeningen" id="{8e127d10-5bc8-22fb-fcd4-2d6d2daf9a0e}">
           <p14:sldIdLst>
             <p14:sldId id="274"/>
             <p14:sldId id="275"/>
@@ -195,7 +195,7 @@
             <p14:sldId id="287"/>
           </p14:sldIdLst>
         </p14:section>
-        <p14:section name="Clôture" id="{1528e04d-db1a-aa2a-61a1-e5f408f914f9}">
+        <p14:section name="Clôture" id="{ed3c4877-de1c-9bee-4f36-fa1bfb37b69b}">
           <p14:sldIdLst>
             <p14:sldId id="288"/>
           </p14:sldIdLst>

--- a/neerlandais1/powerpoints/Module_5_De_of_het.pptx
+++ b/neerlandais1/powerpoints/Module_5_De_of_het.pptx
@@ -139,18 +139,18 @@
   <p:extLst>
     <p:ext uri="{521415D9-36F7-43E2-AB2F-B90AF26B5E84}">
       <p14:sectionLst xmlns:p14="http://schemas.microsoft.com/office/powerpoint/2010/main">
-        <p14:section name="Ouverture" id="{df174f6a-05cf-382d-0b7d-f2d65998f96f}">
+        <p14:section name="Ouverture" id="{e52b3ccb-d609-95a9-2eb6-65e2b7ed168d}">
           <p14:sldIdLst>
             <p14:sldId id="256"/>
           </p14:sldIdLst>
         </p14:section>
-        <p14:section name="Découvrir" id="{f69f6964-26d1-1378-8606-69656ea43db0}">
+        <p14:section name="Découvrir" id="{741eec37-636e-5179-49a4-c7382e27f730}">
           <p14:sldIdLst>
             <p14:sldId id="257"/>
             <p14:sldId id="258"/>
           </p14:sldIdLst>
         </p14:section>
-        <p14:section name="Le système" id="{ed49c06a-6b9c-d686-3592-2aa4bc6f2f02}">
+        <p14:section name="Le système" id="{ad6b1fc5-a9e1-be3f-5331-d885c2c438bb}">
           <p14:sldIdLst>
             <p14:sldId id="259"/>
             <p14:sldId id="260"/>
@@ -158,7 +158,7 @@
             <p14:sldId id="262"/>
           </p14:sldIdLst>
         </p14:section>
-        <p14:section name="Les familles DE" id="{a91f7ec1-1883-3910-bdaf-0fdb262c6e98}">
+        <p14:section name="Les familles DE" id="{8e415d43-e841-63fe-6083-a7093af35688}">
           <p14:sldIdLst>
             <p14:sldId id="263"/>
             <p14:sldId id="264"/>
@@ -166,7 +166,7 @@
             <p14:sldId id="266"/>
           </p14:sldIdLst>
         </p14:section>
-        <p14:section name="Les familles HET · mots composés" id="{70839507-d2e4-1515-6be9-17b4903f0def}">
+        <p14:section name="Les familles HET · mots composés" id="{aab8bfcc-a730-7b06-2f97-7100457a8dd5}">
           <p14:sldIdLst>
             <p14:sldId id="267"/>
             <p14:sldId id="268"/>
@@ -177,7 +177,7 @@
             <p14:sldId id="273"/>
           </p14:sldIdLst>
         </p14:section>
-        <p14:section name="JIJ NU ! — Oefeningen" id="{8e127d10-5bc8-22fb-fcd4-2d6d2daf9a0e}">
+        <p14:section name="JIJ NU ! — Oefeningen" id="{0f65fb2c-70a8-b7ba-5033-034a35b8f6f0}">
           <p14:sldIdLst>
             <p14:sldId id="274"/>
             <p14:sldId id="275"/>
@@ -195,7 +195,7 @@
             <p14:sldId id="287"/>
           </p14:sldIdLst>
         </p14:section>
-        <p14:section name="Clôture" id="{ed3c4877-de1c-9bee-4f36-fa1bfb37b69b}">
+        <p14:section name="Clôture" id="{c5968633-ba9c-2fc1-49ca-670e1687958e}">
           <p14:sldIdLst>
             <p14:sldId id="288"/>
           </p14:sldIdLst>

--- a/neerlandais1/powerpoints/Module_5_De_of_het.pptx
+++ b/neerlandais1/powerpoints/Module_5_De_of_het.pptx
@@ -139,18 +139,18 @@
   <p:extLst>
     <p:ext uri="{521415D9-36F7-43E2-AB2F-B90AF26B5E84}">
       <p14:sectionLst xmlns:p14="http://schemas.microsoft.com/office/powerpoint/2010/main">
-        <p14:section name="Ouverture" id="{e52b3ccb-d609-95a9-2eb6-65e2b7ed168d}">
+        <p14:section name="Ouverture" id="{6c898871-3c0e-f7b0-24dd-0a82b55bce3d}">
           <p14:sldIdLst>
             <p14:sldId id="256"/>
           </p14:sldIdLst>
         </p14:section>
-        <p14:section name="Découvrir" id="{741eec37-636e-5179-49a4-c7382e27f730}">
+        <p14:section name="Découvrir" id="{e3804b76-21c1-e6cc-f8da-a9df5e79ea58}">
           <p14:sldIdLst>
             <p14:sldId id="257"/>
             <p14:sldId id="258"/>
           </p14:sldIdLst>
         </p14:section>
-        <p14:section name="Le système" id="{ad6b1fc5-a9e1-be3f-5331-d885c2c438bb}">
+        <p14:section name="Le système" id="{5c64fdd8-2149-5215-2417-eb53df682830}">
           <p14:sldIdLst>
             <p14:sldId id="259"/>
             <p14:sldId id="260"/>
@@ -158,7 +158,7 @@
             <p14:sldId id="262"/>
           </p14:sldIdLst>
         </p14:section>
-        <p14:section name="Les familles DE" id="{8e415d43-e841-63fe-6083-a7093af35688}">
+        <p14:section name="Les familles DE" id="{acbe1f72-6b90-c322-37b6-b1a09a10b456}">
           <p14:sldIdLst>
             <p14:sldId id="263"/>
             <p14:sldId id="264"/>
@@ -166,7 +166,7 @@
             <p14:sldId id="266"/>
           </p14:sldIdLst>
         </p14:section>
-        <p14:section name="Les familles HET · mots composés" id="{aab8bfcc-a730-7b06-2f97-7100457a8dd5}">
+        <p14:section name="Les familles HET · mots composés" id="{0141af0a-598a-9d17-35ed-c44e08c580de}">
           <p14:sldIdLst>
             <p14:sldId id="267"/>
             <p14:sldId id="268"/>
@@ -177,7 +177,7 @@
             <p14:sldId id="273"/>
           </p14:sldIdLst>
         </p14:section>
-        <p14:section name="JIJ NU ! — Oefeningen" id="{0f65fb2c-70a8-b7ba-5033-034a35b8f6f0}">
+        <p14:section name="JIJ NU ! — Oefeningen" id="{4e561c5a-cc91-6797-a56d-df7d925caf3b}">
           <p14:sldIdLst>
             <p14:sldId id="274"/>
             <p14:sldId id="275"/>
@@ -195,7 +195,7 @@
             <p14:sldId id="287"/>
           </p14:sldIdLst>
         </p14:section>
-        <p14:section name="Clôture" id="{c5968633-ba9c-2fc1-49ca-670e1687958e}">
+        <p14:section name="Clôture" id="{dcb1a816-009b-d571-527a-ba57b0c968a5}">
           <p14:sldIdLst>
             <p14:sldId id="288"/>
           </p14:sldIdLst>

--- a/neerlandais1/powerpoints/Module_5_De_of_het.pptx
+++ b/neerlandais1/powerpoints/Module_5_De_of_het.pptx
@@ -139,18 +139,18 @@
   <p:extLst>
     <p:ext uri="{521415D9-36F7-43E2-AB2F-B90AF26B5E84}">
       <p14:sectionLst xmlns:p14="http://schemas.microsoft.com/office/powerpoint/2010/main">
-        <p14:section name="Ouverture" id="{6c898871-3c0e-f7b0-24dd-0a82b55bce3d}">
+        <p14:section name="Ouverture" id="{f64b274a-4660-433f-6d78-0eedb7297100}">
           <p14:sldIdLst>
             <p14:sldId id="256"/>
           </p14:sldIdLst>
         </p14:section>
-        <p14:section name="Découvrir" id="{e3804b76-21c1-e6cc-f8da-a9df5e79ea58}">
+        <p14:section name="Découvrir" id="{84e4780b-4946-ccdd-64e8-ab912b0a1da9}">
           <p14:sldIdLst>
             <p14:sldId id="257"/>
             <p14:sldId id="258"/>
           </p14:sldIdLst>
         </p14:section>
-        <p14:section name="Le système" id="{5c64fdd8-2149-5215-2417-eb53df682830}">
+        <p14:section name="Le système" id="{677faeb0-4a7e-abe4-6c71-af95be83a4de}">
           <p14:sldIdLst>
             <p14:sldId id="259"/>
             <p14:sldId id="260"/>
@@ -158,7 +158,7 @@
             <p14:sldId id="262"/>
           </p14:sldIdLst>
         </p14:section>
-        <p14:section name="Les familles DE" id="{acbe1f72-6b90-c322-37b6-b1a09a10b456}">
+        <p14:section name="Les familles DE" id="{99ab8fb9-250b-8216-8d4c-f86cb32f9d33}">
           <p14:sldIdLst>
             <p14:sldId id="263"/>
             <p14:sldId id="264"/>
@@ -166,7 +166,7 @@
             <p14:sldId id="266"/>
           </p14:sldIdLst>
         </p14:section>
-        <p14:section name="Les familles HET · mots composés" id="{0141af0a-598a-9d17-35ed-c44e08c580de}">
+        <p14:section name="Les familles HET · mots composés" id="{70bf9e6e-ee1c-23a8-1217-58d925e855fc}">
           <p14:sldIdLst>
             <p14:sldId id="267"/>
             <p14:sldId id="268"/>
@@ -177,7 +177,7 @@
             <p14:sldId id="273"/>
           </p14:sldIdLst>
         </p14:section>
-        <p14:section name="JIJ NU ! — Oefeningen" id="{4e561c5a-cc91-6797-a56d-df7d925caf3b}">
+        <p14:section name="JIJ NU ! — Oefeningen" id="{435a5eaf-92c9-4732-1d6e-aa7324f57f54}">
           <p14:sldIdLst>
             <p14:sldId id="274"/>
             <p14:sldId id="275"/>
@@ -195,7 +195,7 @@
             <p14:sldId id="287"/>
           </p14:sldIdLst>
         </p14:section>
-        <p14:section name="Clôture" id="{dcb1a816-009b-d571-527a-ba57b0c968a5}">
+        <p14:section name="Clôture" id="{7365e71c-c080-368e-e714-0005482e30b3}">
           <p14:sldIdLst>
             <p14:sldId id="288"/>
           </p14:sldIdLst>

--- a/neerlandais1/powerpoints/Module_5_De_of_het.pptx
+++ b/neerlandais1/powerpoints/Module_5_De_of_het.pptx
@@ -139,18 +139,18 @@
   <p:extLst>
     <p:ext uri="{521415D9-36F7-43E2-AB2F-B90AF26B5E84}">
       <p14:sectionLst xmlns:p14="http://schemas.microsoft.com/office/powerpoint/2010/main">
-        <p14:section name="Ouverture" id="{f64b274a-4660-433f-6d78-0eedb7297100}">
+        <p14:section name="Ouverture" id="{beb569c9-b6fd-5e19-7f91-5422488ad019}">
           <p14:sldIdLst>
             <p14:sldId id="256"/>
           </p14:sldIdLst>
         </p14:section>
-        <p14:section name="Découvrir" id="{84e4780b-4946-ccdd-64e8-ab912b0a1da9}">
+        <p14:section name="Découvrir" id="{a102fabf-f3d1-64cb-f512-194c951b21e9}">
           <p14:sldIdLst>
             <p14:sldId id="257"/>
             <p14:sldId id="258"/>
           </p14:sldIdLst>
         </p14:section>
-        <p14:section name="Le système" id="{677faeb0-4a7e-abe4-6c71-af95be83a4de}">
+        <p14:section name="Le système" id="{9a96af0e-762a-c017-978d-aabab3d65c00}">
           <p14:sldIdLst>
             <p14:sldId id="259"/>
             <p14:sldId id="260"/>
@@ -158,7 +158,7 @@
             <p14:sldId id="262"/>
           </p14:sldIdLst>
         </p14:section>
-        <p14:section name="Les familles DE" id="{99ab8fb9-250b-8216-8d4c-f86cb32f9d33}">
+        <p14:section name="Les familles DE" id="{e9899535-6875-e437-dd91-430e37576765}">
           <p14:sldIdLst>
             <p14:sldId id="263"/>
             <p14:sldId id="264"/>
@@ -166,7 +166,7 @@
             <p14:sldId id="266"/>
           </p14:sldIdLst>
         </p14:section>
-        <p14:section name="Les familles HET · mots composés" id="{70bf9e6e-ee1c-23a8-1217-58d925e855fc}">
+        <p14:section name="Les familles HET · mots composés" id="{11ed0dfa-85d9-aeb1-3a58-83cce30b57ad}">
           <p14:sldIdLst>
             <p14:sldId id="267"/>
             <p14:sldId id="268"/>
@@ -177,7 +177,7 @@
             <p14:sldId id="273"/>
           </p14:sldIdLst>
         </p14:section>
-        <p14:section name="JIJ NU ! — Oefeningen" id="{435a5eaf-92c9-4732-1d6e-aa7324f57f54}">
+        <p14:section name="JIJ NU ! — Oefeningen" id="{d09bae83-be01-9614-d6a9-f8644dde3a2b}">
           <p14:sldIdLst>
             <p14:sldId id="274"/>
             <p14:sldId id="275"/>
@@ -195,7 +195,7 @@
             <p14:sldId id="287"/>
           </p14:sldIdLst>
         </p14:section>
-        <p14:section name="Clôture" id="{7365e71c-c080-368e-e714-0005482e30b3}">
+        <p14:section name="Clôture" id="{b65cd73a-9e3f-15ab-eeea-af78fc14c9b4}">
           <p14:sldIdLst>
             <p14:sldId id="288"/>
           </p14:sldIdLst>

--- a/neerlandais1/powerpoints/Module_5_De_of_het.pptx
+++ b/neerlandais1/powerpoints/Module_5_De_of_het.pptx
@@ -139,18 +139,18 @@
   <p:extLst>
     <p:ext uri="{521415D9-36F7-43E2-AB2F-B90AF26B5E84}">
       <p14:sectionLst xmlns:p14="http://schemas.microsoft.com/office/powerpoint/2010/main">
-        <p14:section name="Ouverture" id="{beb569c9-b6fd-5e19-7f91-5422488ad019}">
+        <p14:section name="Ouverture" id="{66fa09e5-8cf7-5b8c-5997-2a3ae06bbb39}">
           <p14:sldIdLst>
             <p14:sldId id="256"/>
           </p14:sldIdLst>
         </p14:section>
-        <p14:section name="Découvrir" id="{a102fabf-f3d1-64cb-f512-194c951b21e9}">
+        <p14:section name="Découvrir" id="{b8705ca0-5f34-647a-48f9-2465b352ed7e}">
           <p14:sldIdLst>
             <p14:sldId id="257"/>
             <p14:sldId id="258"/>
           </p14:sldIdLst>
         </p14:section>
-        <p14:section name="Le système" id="{9a96af0e-762a-c017-978d-aabab3d65c00}">
+        <p14:section name="Le système" id="{48ad29a3-a0ff-748b-a190-7e4c6f1e28a5}">
           <p14:sldIdLst>
             <p14:sldId id="259"/>
             <p14:sldId id="260"/>
@@ -158,7 +158,7 @@
             <p14:sldId id="262"/>
           </p14:sldIdLst>
         </p14:section>
-        <p14:section name="Les familles DE" id="{e9899535-6875-e437-dd91-430e37576765}">
+        <p14:section name="Les familles DE" id="{b2a3d7a4-0717-5361-1b29-b82e2e637703}">
           <p14:sldIdLst>
             <p14:sldId id="263"/>
             <p14:sldId id="264"/>
@@ -166,7 +166,7 @@
             <p14:sldId id="266"/>
           </p14:sldIdLst>
         </p14:section>
-        <p14:section name="Les familles HET · mots composés" id="{11ed0dfa-85d9-aeb1-3a58-83cce30b57ad}">
+        <p14:section name="Les familles HET · mots composés" id="{de02355f-9cec-19a3-7582-84e777389a64}">
           <p14:sldIdLst>
             <p14:sldId id="267"/>
             <p14:sldId id="268"/>
@@ -177,7 +177,7 @@
             <p14:sldId id="273"/>
           </p14:sldIdLst>
         </p14:section>
-        <p14:section name="JIJ NU ! — Oefeningen" id="{d09bae83-be01-9614-d6a9-f8644dde3a2b}">
+        <p14:section name="JIJ NU ! — Oefeningen" id="{169cd131-ba2c-6a5f-4d0c-140a1c90e0e7}">
           <p14:sldIdLst>
             <p14:sldId id="274"/>
             <p14:sldId id="275"/>
@@ -195,7 +195,7 @@
             <p14:sldId id="287"/>
           </p14:sldIdLst>
         </p14:section>
-        <p14:section name="Clôture" id="{b65cd73a-9e3f-15ab-eeea-af78fc14c9b4}">
+        <p14:section name="Clôture" id="{d4cedf39-26d3-b7a7-29c5-bce4c85ebd9f}">
           <p14:sldIdLst>
             <p14:sldId id="288"/>
           </p14:sldIdLst>
